--- a/app/static/exports/机器学习基础_增强版.pptx
+++ b/app/static/exports/机器学习基础_增强版.pptx
@@ -3184,52 +3184,52 @@
           <a:lstStyle/>
           <a:p>
             <a:r>
-              <a:t>- 机器学习是人工智能的一个分支，旨在让计算机通过数据学习并改进其性能，而无需显式编程</a:t>
-            </a:r>
-          </a:p>
-          <a:p>
-            <a:r>
-              <a:t>- 机器学习的核心思想是通过分析大量数据，自动发现模式并做出预测或决策</a:t>
-            </a:r>
-          </a:p>
-          <a:p>
-            <a:r>
-              <a:t>- 机器学习主要分为监督学习、无监督学习、半监督学习和强化学习四类</a:t>
-            </a:r>
-          </a:p>
-          <a:p>
-            <a:r>
-              <a:t>- 监督学习依赖于带有标签的数据集，用于分类和回归任务</a:t>
-            </a:r>
-          </a:p>
-          <a:p>
-            <a:r>
-              <a:t>- 无监督学习处理没有标签的数据，常用于聚类和降维</a:t>
-            </a:r>
-          </a:p>
-          <a:p>
-            <a:r>
-              <a:t>- 半监督学习结合了有标签和无标签数据，适用于标签获取成本高的场景</a:t>
-            </a:r>
-          </a:p>
-          <a:p>
-            <a:r>
-              <a:t>- 强化学习通过与环境的交互来学习最优策略，广泛应用于机器人和游戏领域</a:t>
-            </a:r>
-          </a:p>
-          <a:p>
-            <a:r>
-              <a:t>- 机器学习的应用场景涵盖图像识别、自然语言处理、推荐系统、金融风控、医疗诊断等多个领域</a:t>
-            </a:r>
-          </a:p>
-          <a:p>
-            <a:r>
-              <a:t>- 机器学习模型的性能依赖于数据质量、特征工程和算法选择</a:t>
-            </a:r>
-          </a:p>
-          <a:p>
-            <a:r>
-              <a:t>- 机器学习的发展推动了大数据、云计算和自动化技术的深度融合与创新</a:t>
+              <a:t>- 机器学习是人工智能的一个分支，旨在使计算机能够通过数据学习并改进其性能，而无需显式编程</a:t>
+            </a:r>
+          </a:p>
+          <a:p>
+            <a:r>
+              <a:t>- 机器学习的核心思想是利用数据训练模型，使其能够对未知数据进行预测或决策</a:t>
+            </a:r>
+          </a:p>
+          <a:p>
+            <a:r>
+              <a:t>- 机器学习主要分为三类：监督学习、无监督学习和强化学习</a:t>
+            </a:r>
+          </a:p>
+          <a:p>
+            <a:r>
+              <a:t>- 监督学习依赖于带有标签的数据集，用于预测或分类任务，如回归和分类</a:t>
+            </a:r>
+          </a:p>
+          <a:p>
+            <a:r>
+              <a:t>- 无监督学习处理没有标签的数据，常用于聚类和降维，如K均值和主成分分析</a:t>
+            </a:r>
+          </a:p>
+          <a:p>
+            <a:r>
+              <a:t>- 强化学习通过与环境的交互来学习策略，以最大化累积奖励，常见于机器人控制和游戏AI</a:t>
+            </a:r>
+          </a:p>
+          <a:p>
+            <a:r>
+              <a:t>- 机器学习广泛应用于图像识别、自然语言处理、推荐系统、金融风控、医疗诊断等多个领域</a:t>
+            </a:r>
+          </a:p>
+          <a:p>
+            <a:r>
+              <a:t>- 机器学习流程通常包括数据收集、数据预处理、特征工程、模型选择与训练、模型评估与调优</a:t>
+            </a:r>
+          </a:p>
+          <a:p>
+            <a:r>
+              <a:t>- 模型评估常用指标包括准确率、精确率、召回率、F1分数、AUC-ROC曲线等</a:t>
+            </a:r>
+          </a:p>
+          <a:p>
+            <a:r>
+              <a:t>- 过拟合和欠拟合是机器学习中常见的问题，需通过交叉验证、正则化等方法进行解决</a:t>
             </a:r>
           </a:p>
         </p:txBody>
@@ -3289,7 +3289,7 @@
           <a:lstStyle/>
           <a:p>
             <a:r>
-              <a:t>- 监督学习定义：基于带有标签的数据集，通过学习输入与输出之间的映射关系来进行预测</a:t>
+              <a:t>- 监督学习定义：基于带有标签的数据集，通过学习输入与输出之间的映射关系进行预测</a:t>
             </a:r>
           </a:p>
           <a:p>
@@ -3304,27 +3304,12 @@
           </a:p>
           <a:p>
             <a:r>
-              <a:t>- 监督学习的核心目标：最小化损失函数，提高模型在测试数据上的泛化能力</a:t>
-            </a:r>
-          </a:p>
-          <a:p>
-            <a:r>
-              <a:t>- 特征选择与工程：对原始数据进行处理，提取有助于模型训练的特征</a:t>
-            </a:r>
-          </a:p>
-          <a:p>
-            <a:r>
-              <a:t>- 数据划分：通常将数据分为训练集、验证集和测试集，用于模型训练与评估</a:t>
-            </a:r>
-          </a:p>
-          <a:p>
-            <a:r>
-              <a:t>- 损失函数：衡量模型预测结果与真实值之间的差异，如均方误差（MSE）、交叉熵损失</a:t>
-            </a:r>
-          </a:p>
-          <a:p>
-            <a:r>
-              <a:t>- 优化算法：用于更新模型参数以最小化损失，如梯度下降、随机梯度下降</a:t>
+              <a:t>- 监督学习流程：数据收集、特征提取、模型训练、模型评估、模型部署</a:t>
+            </a:r>
+          </a:p>
+          <a:p>
+            <a:r>
+              <a:t>- 损失函数作用：衡量模型预测值与真实值之间的误差，用于优化模型参数</a:t>
             </a:r>
           </a:p>
           <a:p>
@@ -3334,32 +3319,47 @@
           </a:p>
           <a:p>
             <a:r>
-              <a:t>- 常见回归算法：线性回归、岭回归、Lasso回归、决策树回归、梯度提升机（GBM）</a:t>
-            </a:r>
-          </a:p>
-          <a:p>
-            <a:r>
-              <a:t>- 过拟合与欠拟合：模型在训练数据上表现好但测试数据差为过拟合，反之为欠拟合</a:t>
-            </a:r>
-          </a:p>
-          <a:p>
-            <a:r>
-              <a:t>- 正则化方法：如L1、L2正则化，用于防止模型过拟合</a:t>
-            </a:r>
-          </a:p>
-          <a:p>
-            <a:r>
-              <a:t>- 交叉验证：通过多次划分数据集来更准确地评估模型性能</a:t>
-            </a:r>
-          </a:p>
-          <a:p>
-            <a:r>
-              <a:t>- 模型评估指标：分类任务常用准确率、精确率、召回率、F1分数；回归任务常用R²、MAE、RMSE</a:t>
-            </a:r>
-          </a:p>
-          <a:p>
-            <a:r>
-              <a:t>- 超参数调优：通过网格搜索、随机搜索或贝叶斯优化等方法优化模型性能</a:t>
+              <a:t>- 常见回归算法：线性回归、岭回归、Lasso回归、决策树回归、梯度提升树（GBDT）</a:t>
+            </a:r>
+          </a:p>
+          <a:p>
+            <a:r>
+              <a:t>- 过拟合与欠拟合：模型在训练集表现好但泛化能力差为过拟合，反之为欠拟合</a:t>
+            </a:r>
+          </a:p>
+          <a:p>
+            <a:r>
+              <a:t>- 交叉验证方法：如k折交叉验证，用于评估模型性能并防止过拟合</a:t>
+            </a:r>
+          </a:p>
+          <a:p>
+            <a:r>
+              <a:t>- 特征工程的重要性：选择和构造合适的特征能显著提升模型性能</a:t>
+            </a:r>
+          </a:p>
+          <a:p>
+            <a:r>
+              <a:t>- 标准化与归一化：对输入特征进行处理以提高模型收敛速度和性能</a:t>
+            </a:r>
+          </a:p>
+          <a:p>
+            <a:r>
+              <a:t>- 模型评估指标：分类任务常用准确率、精确率、召回率、F1分数；回归任务常用均方误差（MSE）、平均绝对误差（MAE）</a:t>
+            </a:r>
+          </a:p>
+          <a:p>
+            <a:r>
+              <a:t>- 正则化技术：如L1/L2正则化，用于控制模型复杂度，防止过拟合</a:t>
+            </a:r>
+          </a:p>
+          <a:p>
+            <a:r>
+              <a:t>- 有监督学习的应用场景：金融风控、医疗诊断、推荐系统、自然语言处理等</a:t>
+            </a:r>
+          </a:p>
+          <a:p>
+            <a:r>
+              <a:t>- 监督学习与无监督学习的区别：是否依赖带标签的数据进行训练</a:t>
             </a:r>
           </a:p>
         </p:txBody>
@@ -3419,7 +3419,7 @@
           <a:lstStyle/>
           <a:p>
             <a:r>
-              <a:t>- 聚类是无监督学习的核心方法，用于将数据划分为具有相似特征的组</a:t>
+              <a:t>- 聚类是无监督学习的核心方法，用于将数据划分为具有相似特征的子集</a:t>
             </a:r>
           </a:p>
           <a:p>
@@ -3429,67 +3429,42 @@
           </a:p>
           <a:p>
             <a:r>
-              <a:t>- K均值算法通过迭代优化中心点来最小化样本与中心的平方误差和</a:t>
-            </a:r>
-          </a:p>
-          <a:p>
-            <a:r>
-              <a:t>- 层次聚类通过构建树状结构展示数据的层次关系，适用于不同粒度的分析</a:t>
-            </a:r>
-          </a:p>
-          <a:p>
-            <a:r>
-              <a:t>- DBSCAN基于密度进行聚类，能够识别噪声点并处理任意形状的簇</a:t>
-            </a:r>
-          </a:p>
-          <a:p>
-            <a:r>
-              <a:t>- 降维技术用于减少数据维度，同时保留重要信息，常用于可视化和提高模型效率</a:t>
-            </a:r>
-          </a:p>
-          <a:p>
-            <a:r>
-              <a:t>- 主成分分析（PCA）是一种线性降维方法，通过最大化方差来提取主成分</a:t>
-            </a:r>
-          </a:p>
-          <a:p>
-            <a:r>
-              <a:t>- t-SNE 是一种非线性降维方法，特别适合高维数据的可视化</a:t>
-            </a:r>
-          </a:p>
-          <a:p>
-            <a:r>
-              <a:t>- 异常检测旨在识别与大多数数据显著不同的样本，常用于欺诈检测和系统监控</a:t>
-            </a:r>
-          </a:p>
-          <a:p>
-            <a:r>
-              <a:t>- 基于统计的方法如Z-score、孤立森林等可用于检测异常点</a:t>
-            </a:r>
-          </a:p>
-          <a:p>
-            <a:r>
-              <a:t>- 无监督学习不依赖标签数据，因此在数据标注困难或成本高的场景中尤为重要</a:t>
-            </a:r>
-          </a:p>
-          <a:p>
-            <a:r>
-              <a:t>- 无监督学习结果的评估通常依赖于领域知识或外部指标，如轮廓系数、Davies-Bouldin指数等</a:t>
-            </a:r>
-          </a:p>
-          <a:p>
-            <a:r>
-              <a:t>- 聚类和降维可以作为预处理步骤，为后续有监督学习任务提供更有效的特征表示</a:t>
-            </a:r>
-          </a:p>
-          <a:p>
-            <a:r>
-              <a:t>- 无监督学习在推荐系统、客户细分、图像分割等领域有广泛应用</a:t>
-            </a:r>
-          </a:p>
-          <a:p>
-            <a:r>
-              <a:t>- 随着深度学习的发展，出现了自编码器、变分自编码器（VAE）等无监督学习模型</a:t>
+              <a:t>- 聚类可用于客户分群、图像分割和文档分类等任务</a:t>
+            </a:r>
+          </a:p>
+          <a:p>
+            <a:r>
+              <a:t>- 降维技术旨在减少数据维度同时保留关键信息，常用于可视化和特征压缩</a:t>
+            </a:r>
+          </a:p>
+          <a:p>
+            <a:r>
+              <a:t>- 主成分分析（PCA）和t-SNE是常用的降维方法，分别适用于线性和非线性数据</a:t>
+            </a:r>
+          </a:p>
+          <a:p>
+            <a:r>
+              <a:t>- 异常检测用于识别与大多数数据显著不同的样本，常用于欺诈检测和系统监控</a:t>
+            </a:r>
+          </a:p>
+          <a:p>
+            <a:r>
+              <a:t>- 无监督异常检测方法包括基于统计的方法、密度估计和孤立森林等</a:t>
+            </a:r>
+          </a:p>
+          <a:p>
+            <a:r>
+              <a:t>- 无监督学习不依赖标签数据，适合处理未标注的大规模数据集</a:t>
+            </a:r>
+          </a:p>
+          <a:p>
+            <a:r>
+              <a:t>- 评估无监督学习模型通常依赖于领域知识或外部指标，如轮廓系数和簇内误差</a:t>
+            </a:r>
+          </a:p>
+          <a:p>
+            <a:r>
+              <a:t>- 无监督学习在推荐系统、数据压缩和预处理中发挥重要作用</a:t>
             </a:r>
           </a:p>
         </p:txBody>
